--- a/use_cases_2.pptx
+++ b/use_cases_2.pptx
@@ -198,7 +198,7 @@
           <a:p>
             <a:fld id="{643F7372-8583-3647-8A6D-8602282481EA}" type="datetimeFigureOut">
               <a:rPr lang="en-US" smtClean="0"/>
-              <a:t>11/12/25</a:t>
+              <a:t>11/14/25</a:t>
             </a:fld>
             <a:endParaRPr lang="en-US"/>
           </a:p>
@@ -685,7 +685,7 @@
           <a:p>
             <a:fld id="{EA997AF5-C9B8-654C-B523-B4077F0C4FC6}" type="datetimeFigureOut">
               <a:rPr lang="en-GB" smtClean="0"/>
-              <a:t>12/11/2025</a:t>
+              <a:t>14/11/2025</a:t>
             </a:fld>
             <a:endParaRPr lang="en-GB"/>
           </a:p>
@@ -855,7 +855,7 @@
           <a:p>
             <a:fld id="{EA997AF5-C9B8-654C-B523-B4077F0C4FC6}" type="datetimeFigureOut">
               <a:rPr lang="en-GB" smtClean="0"/>
-              <a:t>12/11/2025</a:t>
+              <a:t>14/11/2025</a:t>
             </a:fld>
             <a:endParaRPr lang="en-GB"/>
           </a:p>
@@ -1035,7 +1035,7 @@
           <a:p>
             <a:fld id="{EA997AF5-C9B8-654C-B523-B4077F0C4FC6}" type="datetimeFigureOut">
               <a:rPr lang="en-GB" smtClean="0"/>
-              <a:t>12/11/2025</a:t>
+              <a:t>14/11/2025</a:t>
             </a:fld>
             <a:endParaRPr lang="en-GB"/>
           </a:p>
@@ -1205,7 +1205,7 @@
           <a:p>
             <a:fld id="{EA997AF5-C9B8-654C-B523-B4077F0C4FC6}" type="datetimeFigureOut">
               <a:rPr lang="en-GB" smtClean="0"/>
-              <a:t>12/11/2025</a:t>
+              <a:t>14/11/2025</a:t>
             </a:fld>
             <a:endParaRPr lang="en-GB"/>
           </a:p>
@@ -1451,7 +1451,7 @@
           <a:p>
             <a:fld id="{EA997AF5-C9B8-654C-B523-B4077F0C4FC6}" type="datetimeFigureOut">
               <a:rPr lang="en-GB" smtClean="0"/>
-              <a:t>12/11/2025</a:t>
+              <a:t>14/11/2025</a:t>
             </a:fld>
             <a:endParaRPr lang="en-GB"/>
           </a:p>
@@ -1683,7 +1683,7 @@
           <a:p>
             <a:fld id="{EA997AF5-C9B8-654C-B523-B4077F0C4FC6}" type="datetimeFigureOut">
               <a:rPr lang="en-GB" smtClean="0"/>
-              <a:t>12/11/2025</a:t>
+              <a:t>14/11/2025</a:t>
             </a:fld>
             <a:endParaRPr lang="en-GB"/>
           </a:p>
@@ -2050,7 +2050,7 @@
           <a:p>
             <a:fld id="{EA997AF5-C9B8-654C-B523-B4077F0C4FC6}" type="datetimeFigureOut">
               <a:rPr lang="en-GB" smtClean="0"/>
-              <a:t>12/11/2025</a:t>
+              <a:t>14/11/2025</a:t>
             </a:fld>
             <a:endParaRPr lang="en-GB"/>
           </a:p>
@@ -2168,7 +2168,7 @@
           <a:p>
             <a:fld id="{EA997AF5-C9B8-654C-B523-B4077F0C4FC6}" type="datetimeFigureOut">
               <a:rPr lang="en-GB" smtClean="0"/>
-              <a:t>12/11/2025</a:t>
+              <a:t>14/11/2025</a:t>
             </a:fld>
             <a:endParaRPr lang="en-GB"/>
           </a:p>
@@ -2263,7 +2263,7 @@
           <a:p>
             <a:fld id="{EA997AF5-C9B8-654C-B523-B4077F0C4FC6}" type="datetimeFigureOut">
               <a:rPr lang="en-GB" smtClean="0"/>
-              <a:t>12/11/2025</a:t>
+              <a:t>14/11/2025</a:t>
             </a:fld>
             <a:endParaRPr lang="en-GB"/>
           </a:p>
@@ -2540,7 +2540,7 @@
           <a:p>
             <a:fld id="{EA997AF5-C9B8-654C-B523-B4077F0C4FC6}" type="datetimeFigureOut">
               <a:rPr lang="en-GB" smtClean="0"/>
-              <a:t>12/11/2025</a:t>
+              <a:t>14/11/2025</a:t>
             </a:fld>
             <a:endParaRPr lang="en-GB"/>
           </a:p>
@@ -2797,7 +2797,7 @@
           <a:p>
             <a:fld id="{EA997AF5-C9B8-654C-B523-B4077F0C4FC6}" type="datetimeFigureOut">
               <a:rPr lang="en-GB" smtClean="0"/>
-              <a:t>12/11/2025</a:t>
+              <a:t>14/11/2025</a:t>
             </a:fld>
             <a:endParaRPr lang="en-GB"/>
           </a:p>
@@ -3010,7 +3010,7 @@
           <a:p>
             <a:fld id="{EA997AF5-C9B8-654C-B523-B4077F0C4FC6}" type="datetimeFigureOut">
               <a:rPr lang="en-GB" smtClean="0"/>
-              <a:t>12/11/2025</a:t>
+              <a:t>14/11/2025</a:t>
             </a:fld>
             <a:endParaRPr lang="en-GB"/>
           </a:p>
@@ -22618,7 +22618,7 @@
         </p:nvSpPr>
         <p:spPr>
           <a:xfrm>
-            <a:off x="3637932" y="7502182"/>
+            <a:off x="58021" y="1868348"/>
             <a:ext cx="2219626" cy="1211937"/>
           </a:xfrm>
           <a:prstGeom prst="roundRect">
@@ -22701,7 +22701,7 @@
         </p:nvSpPr>
         <p:spPr>
           <a:xfrm>
-            <a:off x="42282" y="17783344"/>
+            <a:off x="127737" y="83181"/>
             <a:ext cx="5648915" cy="1491615"/>
           </a:xfrm>
           <a:prstGeom prst="roundRect">
@@ -22782,7 +22782,7 @@
         </p:nvSpPr>
         <p:spPr>
           <a:xfrm>
-            <a:off x="27980307" y="11812102"/>
+            <a:off x="11749835" y="4541339"/>
             <a:ext cx="2767672" cy="2610326"/>
           </a:xfrm>
           <a:prstGeom prst="roundRect">
@@ -22941,7 +22941,7 @@
         </p:nvSpPr>
         <p:spPr>
           <a:xfrm>
-            <a:off x="6005360" y="20923445"/>
+            <a:off x="5483223" y="16052266"/>
             <a:ext cx="5648915" cy="932259"/>
           </a:xfrm>
           <a:prstGeom prst="roundRect">
@@ -23022,7 +23022,7 @@
         </p:nvSpPr>
         <p:spPr>
           <a:xfrm>
-            <a:off x="25077773" y="19318238"/>
+            <a:off x="97042" y="7068192"/>
             <a:ext cx="5648915" cy="1211937"/>
           </a:xfrm>
           <a:prstGeom prst="roundRect">
@@ -23216,7 +23216,7 @@
         </p:nvSpPr>
         <p:spPr>
           <a:xfrm>
-            <a:off x="17424918" y="19109526"/>
+            <a:off x="3053206" y="2685861"/>
             <a:ext cx="5648915" cy="2050971"/>
           </a:xfrm>
           <a:prstGeom prst="roundRect">
@@ -23667,7 +23667,7 @@
         </p:nvSpPr>
         <p:spPr>
           <a:xfrm>
-            <a:off x="7290397" y="22768850"/>
+            <a:off x="9071021" y="2839377"/>
             <a:ext cx="5648915" cy="1491615"/>
           </a:xfrm>
           <a:prstGeom prst="roundRect">
@@ -23849,7 +23849,7 @@
         </p:nvSpPr>
         <p:spPr>
           <a:xfrm>
-            <a:off x="25244284" y="20920760"/>
+            <a:off x="24045802" y="17724743"/>
             <a:ext cx="5648915" cy="1491615"/>
           </a:xfrm>
           <a:prstGeom prst="roundRect">
@@ -24110,7 +24110,7 @@
         </p:nvSpPr>
         <p:spPr>
           <a:xfrm>
-            <a:off x="5767393" y="5754755"/>
+            <a:off x="5769713" y="5786630"/>
             <a:ext cx="2110891" cy="1491615"/>
           </a:xfrm>
           <a:prstGeom prst="roundRect">
@@ -24191,7 +24191,7 @@
         </p:nvSpPr>
         <p:spPr>
           <a:xfrm>
-            <a:off x="58021" y="21242282"/>
+            <a:off x="510377" y="18030284"/>
             <a:ext cx="5648915" cy="1211937"/>
           </a:xfrm>
           <a:prstGeom prst="roundRect">
@@ -24502,7 +24502,7 @@
         </p:nvSpPr>
         <p:spPr>
           <a:xfrm>
-            <a:off x="20367629" y="22186432"/>
+            <a:off x="17950374" y="18683348"/>
             <a:ext cx="5648915" cy="2330648"/>
           </a:xfrm>
           <a:prstGeom prst="roundRect">
@@ -24798,7 +24798,7 @@
                 </a:solidFill>
                 <a:latin typeface="Century Gothic" panose="020B0502020202020204" pitchFamily="34" charset="0"/>
               </a:rPr>
-              <a:t>Issue vendor, CRO and laboratory RFP process </a:t>
+              <a:t>Issue vendor, CRO and RFP process laboratory</a:t>
             </a:r>
           </a:p>
         </p:txBody>
@@ -24817,7 +24817,7 @@
         </p:nvSpPr>
         <p:spPr>
           <a:xfrm>
-            <a:off x="293792" y="10131723"/>
+            <a:off x="147639" y="3190155"/>
             <a:ext cx="2658403" cy="1771293"/>
           </a:xfrm>
           <a:prstGeom prst="roundRect">
@@ -24900,7 +24900,7 @@
         </p:nvSpPr>
         <p:spPr>
           <a:xfrm>
-            <a:off x="5503935" y="12615339"/>
+            <a:off x="45894" y="5105362"/>
             <a:ext cx="2303216" cy="1771293"/>
           </a:xfrm>
           <a:prstGeom prst="roundRect">
@@ -24967,140 +24967,6 @@
           </a:p>
         </p:txBody>
       </p:sp>
-      <p:pic>
-        <p:nvPicPr>
-          <p:cNvPr id="311" name="Graphic 310" descr="User outline">
-            <a:extLst>
-              <a:ext uri="{FF2B5EF4-FFF2-40B4-BE49-F238E27FC236}">
-                <a16:creationId xmlns:a16="http://schemas.microsoft.com/office/drawing/2014/main" id="{C05705FB-D3FA-5E56-8A1A-2F5B00440F16}"/>
-              </a:ext>
-            </a:extLst>
-          </p:cNvPr>
-          <p:cNvPicPr>
-            <a:picLocks noChangeAspect="1"/>
-          </p:cNvPicPr>
-          <p:nvPr/>
-        </p:nvPicPr>
-        <p:blipFill>
-          <a:blip r:embed="rId2">
-            <a:extLst>
-              <a:ext uri="{96DAC541-7B7A-43D3-8B79-37D633B846F1}">
-                <asvg:svgBlip xmlns:asvg="http://schemas.microsoft.com/office/drawing/2016/SVG/main" r:embed="rId3"/>
-              </a:ext>
-            </a:extLst>
-          </a:blip>
-          <a:stretch>
-            <a:fillRect/>
-          </a:stretch>
-        </p:blipFill>
-        <p:spPr>
-          <a:xfrm>
-            <a:off x="4366290" y="6515338"/>
-            <a:ext cx="762907" cy="762907"/>
-          </a:xfrm>
-          <a:prstGeom prst="rect">
-            <a:avLst/>
-          </a:prstGeom>
-        </p:spPr>
-      </p:pic>
-      <p:cxnSp>
-        <p:nvCxnSpPr>
-          <p:cNvPr id="375" name="Straight Connector 374">
-            <a:extLst>
-              <a:ext uri="{FF2B5EF4-FFF2-40B4-BE49-F238E27FC236}">
-                <a16:creationId xmlns:a16="http://schemas.microsoft.com/office/drawing/2014/main" id="{09061814-7B52-96FA-38E6-BF26DB7653CF}"/>
-              </a:ext>
-            </a:extLst>
-          </p:cNvPr>
-          <p:cNvCxnSpPr>
-            <a:cxnSpLocks/>
-            <a:stCxn id="254" idx="3"/>
-            <a:endCxn id="428" idx="2"/>
-          </p:cNvCxnSpPr>
-          <p:nvPr/>
-        </p:nvCxnSpPr>
-        <p:spPr>
-          <a:xfrm>
-            <a:off x="2952195" y="11017370"/>
-            <a:ext cx="1518133" cy="0"/>
-          </a:xfrm>
-          <a:prstGeom prst="line">
-            <a:avLst/>
-          </a:prstGeom>
-          <a:ln w="38100">
-            <a:solidFill>
-              <a:schemeClr val="bg1">
-                <a:lumMod val="75000"/>
-              </a:schemeClr>
-            </a:solidFill>
-            <a:prstDash val="sysDash"/>
-            <a:tailEnd type="triangle"/>
-          </a:ln>
-        </p:spPr>
-        <p:style>
-          <a:lnRef idx="2">
-            <a:schemeClr val="accent1"/>
-          </a:lnRef>
-          <a:fillRef idx="0">
-            <a:schemeClr val="accent1"/>
-          </a:fillRef>
-          <a:effectRef idx="1">
-            <a:schemeClr val="accent1"/>
-          </a:effectRef>
-          <a:fontRef idx="minor">
-            <a:schemeClr val="tx1"/>
-          </a:fontRef>
-        </p:style>
-      </p:cxnSp>
-      <p:cxnSp>
-        <p:nvCxnSpPr>
-          <p:cNvPr id="380" name="Straight Connector 379">
-            <a:extLst>
-              <a:ext uri="{FF2B5EF4-FFF2-40B4-BE49-F238E27FC236}">
-                <a16:creationId xmlns:a16="http://schemas.microsoft.com/office/drawing/2014/main" id="{0590AEE3-8366-723E-4030-AA8B91867D52}"/>
-              </a:ext>
-            </a:extLst>
-          </p:cNvPr>
-          <p:cNvCxnSpPr>
-            <a:cxnSpLocks/>
-            <a:stCxn id="287" idx="0"/>
-            <a:endCxn id="429" idx="4"/>
-          </p:cNvCxnSpPr>
-          <p:nvPr/>
-        </p:nvCxnSpPr>
-        <p:spPr>
-          <a:xfrm flipH="1" flipV="1">
-            <a:off x="6647708" y="11729646"/>
-            <a:ext cx="7835" cy="885693"/>
-          </a:xfrm>
-          <a:prstGeom prst="line">
-            <a:avLst/>
-          </a:prstGeom>
-          <a:ln w="38100">
-            <a:solidFill>
-              <a:schemeClr val="bg1">
-                <a:lumMod val="75000"/>
-              </a:schemeClr>
-            </a:solidFill>
-            <a:prstDash val="sysDash"/>
-            <a:tailEnd type="triangle"/>
-          </a:ln>
-        </p:spPr>
-        <p:style>
-          <a:lnRef idx="2">
-            <a:schemeClr val="accent1"/>
-          </a:lnRef>
-          <a:fillRef idx="0">
-            <a:schemeClr val="accent1"/>
-          </a:fillRef>
-          <a:effectRef idx="1">
-            <a:schemeClr val="accent1"/>
-          </a:effectRef>
-          <a:fontRef idx="minor">
-            <a:schemeClr val="tx1"/>
-          </a:fontRef>
-        </p:style>
-      </p:cxnSp>
       <p:sp>
         <p:nvSpPr>
           <p:cNvPr id="408" name="Rounded Rectangle 407">
@@ -25115,7 +24981,7 @@
         </p:nvSpPr>
         <p:spPr>
           <a:xfrm>
-            <a:off x="7417752" y="14915185"/>
+            <a:off x="2619675" y="5184235"/>
             <a:ext cx="2181669" cy="1211937"/>
           </a:xfrm>
           <a:prstGeom prst="roundRect">
@@ -25197,10 +25063,10 @@
           <p:nvPr/>
         </p:nvPicPr>
         <p:blipFill>
-          <a:blip r:embed="rId4">
+          <a:blip r:embed="rId2">
             <a:extLst>
               <a:ext uri="{96DAC541-7B7A-43D3-8B79-37D633B846F1}">
-                <asvg:svgBlip xmlns:asvg="http://schemas.microsoft.com/office/drawing/2016/SVG/main" r:embed="rId5"/>
+                <asvg:svgBlip xmlns:asvg="http://schemas.microsoft.com/office/drawing/2016/SVG/main" r:embed="rId3"/>
               </a:ext>
             </a:extLst>
           </a:blip>
@@ -25210,7 +25076,7 @@
         </p:blipFill>
         <p:spPr>
           <a:xfrm>
-            <a:off x="17597927" y="4332796"/>
+            <a:off x="15913318" y="4075802"/>
             <a:ext cx="1678953" cy="1678953"/>
           </a:xfrm>
           <a:prstGeom prst="rect">
@@ -25664,7 +25530,7 @@
         </p:nvSpPr>
         <p:spPr>
           <a:xfrm>
-            <a:off x="16260024" y="10305094"/>
+            <a:off x="15844771" y="7298165"/>
             <a:ext cx="1407336" cy="1424552"/>
           </a:xfrm>
           <a:prstGeom prst="ellipse">
@@ -26097,10 +25963,10 @@
           <p:nvPr/>
         </p:nvPicPr>
         <p:blipFill>
-          <a:blip r:embed="rId6">
+          <a:blip r:embed="rId4">
             <a:extLst>
               <a:ext uri="{96DAC541-7B7A-43D3-8B79-37D633B846F1}">
-                <asvg:svgBlip xmlns:asvg="http://schemas.microsoft.com/office/drawing/2016/SVG/main" r:embed="rId7"/>
+                <asvg:svgBlip xmlns:asvg="http://schemas.microsoft.com/office/drawing/2016/SVG/main" r:embed="rId5"/>
               </a:ext>
             </a:extLst>
           </a:blip>
@@ -26118,54 +25984,6 @@
           </a:prstGeom>
         </p:spPr>
       </p:pic>
-      <p:cxnSp>
-        <p:nvCxnSpPr>
-          <p:cNvPr id="458" name="Elbow Connector 457">
-            <a:extLst>
-              <a:ext uri="{FF2B5EF4-FFF2-40B4-BE49-F238E27FC236}">
-                <a16:creationId xmlns:a16="http://schemas.microsoft.com/office/drawing/2014/main" id="{C6CF5378-6946-3326-A343-A95D8CD9FF6B}"/>
-              </a:ext>
-            </a:extLst>
-          </p:cNvPr>
-          <p:cNvCxnSpPr>
-            <a:stCxn id="10" idx="2"/>
-            <a:endCxn id="428" idx="0"/>
-          </p:cNvCxnSpPr>
-          <p:nvPr/>
-        </p:nvCxnSpPr>
-        <p:spPr>
-          <a:xfrm rot="16200000" flipH="1">
-            <a:off x="4165383" y="9296480"/>
-            <a:ext cx="1590975" cy="426251"/>
-          </a:xfrm>
-          <a:prstGeom prst="bentConnector3">
-            <a:avLst/>
-          </a:prstGeom>
-          <a:ln w="38100">
-            <a:solidFill>
-              <a:schemeClr val="bg1">
-                <a:lumMod val="75000"/>
-              </a:schemeClr>
-            </a:solidFill>
-            <a:prstDash val="sysDash"/>
-            <a:tailEnd type="triangle"/>
-          </a:ln>
-        </p:spPr>
-        <p:style>
-          <a:lnRef idx="2">
-            <a:schemeClr val="accent1"/>
-          </a:lnRef>
-          <a:fillRef idx="0">
-            <a:schemeClr val="accent1"/>
-          </a:fillRef>
-          <a:effectRef idx="1">
-            <a:schemeClr val="accent1"/>
-          </a:effectRef>
-          <a:fontRef idx="minor">
-            <a:schemeClr val="tx1"/>
-          </a:fontRef>
-        </p:style>
-      </p:cxnSp>
       <p:sp>
         <p:nvSpPr>
           <p:cNvPr id="462" name="Diamond 461">
@@ -26222,108 +26040,6 @@
           </a:p>
         </p:txBody>
       </p:sp>
-      <p:cxnSp>
-        <p:nvCxnSpPr>
-          <p:cNvPr id="464" name="Elbow Connector 463">
-            <a:extLst>
-              <a:ext uri="{FF2B5EF4-FFF2-40B4-BE49-F238E27FC236}">
-                <a16:creationId xmlns:a16="http://schemas.microsoft.com/office/drawing/2014/main" id="{DE01843C-AED7-B29C-6C69-2D23FC09E538}"/>
-              </a:ext>
-            </a:extLst>
-          </p:cNvPr>
-          <p:cNvCxnSpPr>
-            <a:cxnSpLocks/>
-            <a:stCxn id="429" idx="0"/>
-            <a:endCxn id="170" idx="2"/>
-          </p:cNvCxnSpPr>
-          <p:nvPr/>
-        </p:nvCxnSpPr>
-        <p:spPr>
-          <a:xfrm rot="5400000" flipH="1" flipV="1">
-            <a:off x="5205911" y="8688167"/>
-            <a:ext cx="3058724" cy="175131"/>
-          </a:xfrm>
-          <a:prstGeom prst="bentConnector3">
-            <a:avLst>
-              <a:gd name="adj1" fmla="val 50000"/>
-            </a:avLst>
-          </a:prstGeom>
-          <a:ln w="38100">
-            <a:solidFill>
-              <a:schemeClr val="bg1">
-                <a:lumMod val="75000"/>
-              </a:schemeClr>
-            </a:solidFill>
-            <a:prstDash val="sysDash"/>
-            <a:tailEnd type="triangle"/>
-          </a:ln>
-        </p:spPr>
-        <p:style>
-          <a:lnRef idx="2">
-            <a:schemeClr val="accent1"/>
-          </a:lnRef>
-          <a:fillRef idx="0">
-            <a:schemeClr val="accent1"/>
-          </a:fillRef>
-          <a:effectRef idx="1">
-            <a:schemeClr val="accent1"/>
-          </a:effectRef>
-          <a:fontRef idx="minor">
-            <a:schemeClr val="tx1"/>
-          </a:fontRef>
-        </p:style>
-      </p:cxnSp>
-      <p:cxnSp>
-        <p:nvCxnSpPr>
-          <p:cNvPr id="468" name="Elbow Connector 467">
-            <a:extLst>
-              <a:ext uri="{FF2B5EF4-FFF2-40B4-BE49-F238E27FC236}">
-                <a16:creationId xmlns:a16="http://schemas.microsoft.com/office/drawing/2014/main" id="{47354F30-8F7D-2A86-BAD4-96C9C0BD3CAE}"/>
-              </a:ext>
-            </a:extLst>
-          </p:cNvPr>
-          <p:cNvCxnSpPr>
-            <a:cxnSpLocks/>
-            <a:stCxn id="408" idx="0"/>
-            <a:endCxn id="430" idx="4"/>
-          </p:cNvCxnSpPr>
-          <p:nvPr/>
-        </p:nvCxnSpPr>
-        <p:spPr>
-          <a:xfrm rot="16200000" flipV="1">
-            <a:off x="6722235" y="13128832"/>
-            <a:ext cx="3185539" cy="387167"/>
-          </a:xfrm>
-          <a:prstGeom prst="bentConnector3">
-            <a:avLst>
-              <a:gd name="adj1" fmla="val 50000"/>
-            </a:avLst>
-          </a:prstGeom>
-          <a:ln w="38100">
-            <a:solidFill>
-              <a:schemeClr val="bg1">
-                <a:lumMod val="75000"/>
-              </a:schemeClr>
-            </a:solidFill>
-            <a:prstDash val="sysDash"/>
-            <a:tailEnd type="triangle"/>
-          </a:ln>
-        </p:spPr>
-        <p:style>
-          <a:lnRef idx="2">
-            <a:schemeClr val="accent1"/>
-          </a:lnRef>
-          <a:fillRef idx="0">
-            <a:schemeClr val="accent1"/>
-          </a:fillRef>
-          <a:effectRef idx="1">
-            <a:schemeClr val="accent1"/>
-          </a:effectRef>
-          <a:fontRef idx="minor">
-            <a:schemeClr val="tx1"/>
-          </a:fontRef>
-        </p:style>
-      </p:cxnSp>
       <p:sp>
         <p:nvSpPr>
           <p:cNvPr id="472" name="Diamond 471">
@@ -26534,6 +26250,369 @@
           </a:fontRef>
         </p:style>
       </p:cxnSp>
+      <p:sp>
+        <p:nvSpPr>
+          <p:cNvPr id="2" name="Oval 1">
+            <a:extLst>
+              <a:ext uri="{FF2B5EF4-FFF2-40B4-BE49-F238E27FC236}">
+                <a16:creationId xmlns:a16="http://schemas.microsoft.com/office/drawing/2014/main" id="{7A1506C2-A594-BC16-0DE7-D6C3B70F1E66}"/>
+              </a:ext>
+            </a:extLst>
+          </p:cNvPr>
+          <p:cNvSpPr/>
+          <p:nvPr/>
+        </p:nvSpPr>
+        <p:spPr>
+          <a:xfrm>
+            <a:off x="26024664" y="2474317"/>
+            <a:ext cx="1407336" cy="1424552"/>
+          </a:xfrm>
+          <a:prstGeom prst="ellipse">
+            <a:avLst/>
+          </a:prstGeom>
+          <a:solidFill>
+            <a:schemeClr val="accent4">
+              <a:lumMod val="20000"/>
+              <a:lumOff val="80000"/>
+            </a:schemeClr>
+          </a:solidFill>
+          <a:ln>
+            <a:noFill/>
+          </a:ln>
+        </p:spPr>
+        <p:style>
+          <a:lnRef idx="2">
+            <a:schemeClr val="accent1">
+              <a:shade val="15000"/>
+            </a:schemeClr>
+          </a:lnRef>
+          <a:fillRef idx="1">
+            <a:schemeClr val="accent1"/>
+          </a:fillRef>
+          <a:effectRef idx="0">
+            <a:schemeClr val="accent1"/>
+          </a:effectRef>
+          <a:fontRef idx="minor">
+            <a:schemeClr val="lt1"/>
+          </a:fontRef>
+        </p:style>
+        <p:txBody>
+          <a:bodyPr rtlCol="0" anchor="ctr"/>
+          <a:lstStyle/>
+          <a:p>
+            <a:pPr algn="ctr"/>
+            <a:endParaRPr lang="en-DK"/>
+          </a:p>
+        </p:txBody>
+      </p:sp>
+      <p:sp>
+        <p:nvSpPr>
+          <p:cNvPr id="3" name="Oval 2">
+            <a:extLst>
+              <a:ext uri="{FF2B5EF4-FFF2-40B4-BE49-F238E27FC236}">
+                <a16:creationId xmlns:a16="http://schemas.microsoft.com/office/drawing/2014/main" id="{66614C60-34EC-7093-9FBA-B057E16157D1}"/>
+              </a:ext>
+            </a:extLst>
+          </p:cNvPr>
+          <p:cNvSpPr/>
+          <p:nvPr/>
+        </p:nvSpPr>
+        <p:spPr>
+          <a:xfrm>
+            <a:off x="26728411" y="10457494"/>
+            <a:ext cx="1407336" cy="1424552"/>
+          </a:xfrm>
+          <a:prstGeom prst="ellipse">
+            <a:avLst/>
+          </a:prstGeom>
+          <a:solidFill>
+            <a:schemeClr val="bg1">
+              <a:lumMod val="95000"/>
+            </a:schemeClr>
+          </a:solidFill>
+          <a:ln>
+            <a:noFill/>
+          </a:ln>
+        </p:spPr>
+        <p:style>
+          <a:lnRef idx="2">
+            <a:schemeClr val="accent1">
+              <a:shade val="15000"/>
+            </a:schemeClr>
+          </a:lnRef>
+          <a:fillRef idx="1">
+            <a:schemeClr val="accent1"/>
+          </a:fillRef>
+          <a:effectRef idx="0">
+            <a:schemeClr val="accent1"/>
+          </a:effectRef>
+          <a:fontRef idx="minor">
+            <a:schemeClr val="lt1"/>
+          </a:fontRef>
+        </p:style>
+        <p:txBody>
+          <a:bodyPr rtlCol="0" anchor="ctr"/>
+          <a:lstStyle/>
+          <a:p>
+            <a:pPr algn="ctr"/>
+            <a:endParaRPr lang="en-DK"/>
+          </a:p>
+        </p:txBody>
+      </p:sp>
+      <p:sp>
+        <p:nvSpPr>
+          <p:cNvPr id="4" name="Oval 3">
+            <a:extLst>
+              <a:ext uri="{FF2B5EF4-FFF2-40B4-BE49-F238E27FC236}">
+                <a16:creationId xmlns:a16="http://schemas.microsoft.com/office/drawing/2014/main" id="{2583C4BC-4FB3-7593-A29B-E5F9C40CABFF}"/>
+              </a:ext>
+            </a:extLst>
+          </p:cNvPr>
+          <p:cNvSpPr/>
+          <p:nvPr/>
+        </p:nvSpPr>
+        <p:spPr>
+          <a:xfrm>
+            <a:off x="26455372" y="4599735"/>
+            <a:ext cx="1407336" cy="1424552"/>
+          </a:xfrm>
+          <a:prstGeom prst="ellipse">
+            <a:avLst/>
+          </a:prstGeom>
+          <a:solidFill>
+            <a:schemeClr val="accent4">
+              <a:lumMod val="40000"/>
+              <a:lumOff val="60000"/>
+            </a:schemeClr>
+          </a:solidFill>
+          <a:ln>
+            <a:noFill/>
+          </a:ln>
+        </p:spPr>
+        <p:style>
+          <a:lnRef idx="2">
+            <a:schemeClr val="accent1">
+              <a:shade val="15000"/>
+            </a:schemeClr>
+          </a:lnRef>
+          <a:fillRef idx="1">
+            <a:schemeClr val="accent1"/>
+          </a:fillRef>
+          <a:effectRef idx="0">
+            <a:schemeClr val="accent1"/>
+          </a:effectRef>
+          <a:fontRef idx="minor">
+            <a:schemeClr val="lt1"/>
+          </a:fontRef>
+        </p:style>
+        <p:txBody>
+          <a:bodyPr rtlCol="0" anchor="ctr"/>
+          <a:lstStyle/>
+          <a:p>
+            <a:pPr algn="ctr"/>
+            <a:endParaRPr lang="en-DK"/>
+          </a:p>
+        </p:txBody>
+      </p:sp>
+      <p:sp>
+        <p:nvSpPr>
+          <p:cNvPr id="5" name="Oval 4">
+            <a:extLst>
+              <a:ext uri="{FF2B5EF4-FFF2-40B4-BE49-F238E27FC236}">
+                <a16:creationId xmlns:a16="http://schemas.microsoft.com/office/drawing/2014/main" id="{B205D8A5-7E3D-7349-64AC-280AF8D347EB}"/>
+              </a:ext>
+            </a:extLst>
+          </p:cNvPr>
+          <p:cNvSpPr/>
+          <p:nvPr/>
+        </p:nvSpPr>
+        <p:spPr>
+          <a:xfrm>
+            <a:off x="26576011" y="6214519"/>
+            <a:ext cx="1407336" cy="1424552"/>
+          </a:xfrm>
+          <a:prstGeom prst="ellipse">
+            <a:avLst/>
+          </a:prstGeom>
+          <a:solidFill>
+            <a:schemeClr val="accent4">
+              <a:lumMod val="60000"/>
+              <a:lumOff val="40000"/>
+            </a:schemeClr>
+          </a:solidFill>
+          <a:ln>
+            <a:noFill/>
+          </a:ln>
+        </p:spPr>
+        <p:style>
+          <a:lnRef idx="2">
+            <a:schemeClr val="accent1">
+              <a:shade val="15000"/>
+            </a:schemeClr>
+          </a:lnRef>
+          <a:fillRef idx="1">
+            <a:schemeClr val="accent1"/>
+          </a:fillRef>
+          <a:effectRef idx="0">
+            <a:schemeClr val="accent1"/>
+          </a:effectRef>
+          <a:fontRef idx="minor">
+            <a:schemeClr val="lt1"/>
+          </a:fontRef>
+        </p:style>
+        <p:txBody>
+          <a:bodyPr rtlCol="0" anchor="ctr"/>
+          <a:lstStyle/>
+          <a:p>
+            <a:pPr algn="ctr"/>
+            <a:endParaRPr lang="en-DK"/>
+          </a:p>
+        </p:txBody>
+      </p:sp>
+      <p:sp>
+        <p:nvSpPr>
+          <p:cNvPr id="6" name="Oval 5">
+            <a:extLst>
+              <a:ext uri="{FF2B5EF4-FFF2-40B4-BE49-F238E27FC236}">
+                <a16:creationId xmlns:a16="http://schemas.microsoft.com/office/drawing/2014/main" id="{797BAA79-E4AE-693E-1A54-925A05F08780}"/>
+              </a:ext>
+            </a:extLst>
+          </p:cNvPr>
+          <p:cNvSpPr/>
+          <p:nvPr/>
+        </p:nvSpPr>
+        <p:spPr>
+          <a:xfrm>
+            <a:off x="24093313" y="6410554"/>
+            <a:ext cx="1407336" cy="1424552"/>
+          </a:xfrm>
+          <a:prstGeom prst="ellipse">
+            <a:avLst/>
+          </a:prstGeom>
+          <a:solidFill>
+            <a:schemeClr val="accent4">
+              <a:lumMod val="75000"/>
+            </a:schemeClr>
+          </a:solidFill>
+          <a:ln>
+            <a:noFill/>
+          </a:ln>
+        </p:spPr>
+        <p:style>
+          <a:lnRef idx="2">
+            <a:schemeClr val="accent1">
+              <a:shade val="15000"/>
+            </a:schemeClr>
+          </a:lnRef>
+          <a:fillRef idx="1">
+            <a:schemeClr val="accent1"/>
+          </a:fillRef>
+          <a:effectRef idx="0">
+            <a:schemeClr val="accent1"/>
+          </a:effectRef>
+          <a:fontRef idx="minor">
+            <a:schemeClr val="lt1"/>
+          </a:fontRef>
+        </p:style>
+        <p:txBody>
+          <a:bodyPr rtlCol="0" anchor="ctr"/>
+          <a:lstStyle/>
+          <a:p>
+            <a:pPr algn="ctr"/>
+            <a:endParaRPr lang="en-DK"/>
+          </a:p>
+        </p:txBody>
+      </p:sp>
+      <p:sp>
+        <p:nvSpPr>
+          <p:cNvPr id="8" name="Oval 7">
+            <a:extLst>
+              <a:ext uri="{FF2B5EF4-FFF2-40B4-BE49-F238E27FC236}">
+                <a16:creationId xmlns:a16="http://schemas.microsoft.com/office/drawing/2014/main" id="{82F3EE2B-599C-1F3B-7372-64D996C2840F}"/>
+              </a:ext>
+            </a:extLst>
+          </p:cNvPr>
+          <p:cNvSpPr/>
+          <p:nvPr/>
+        </p:nvSpPr>
+        <p:spPr>
+          <a:xfrm>
+            <a:off x="22638466" y="6352329"/>
+            <a:ext cx="1407336" cy="1424552"/>
+          </a:xfrm>
+          <a:prstGeom prst="ellipse">
+            <a:avLst/>
+          </a:prstGeom>
+          <a:solidFill>
+            <a:schemeClr val="accent4">
+              <a:lumMod val="50000"/>
+            </a:schemeClr>
+          </a:solidFill>
+          <a:ln>
+            <a:noFill/>
+          </a:ln>
+        </p:spPr>
+        <p:style>
+          <a:lnRef idx="2">
+            <a:schemeClr val="accent1">
+              <a:shade val="15000"/>
+            </a:schemeClr>
+          </a:lnRef>
+          <a:fillRef idx="1">
+            <a:schemeClr val="accent1"/>
+          </a:fillRef>
+          <a:effectRef idx="0">
+            <a:schemeClr val="accent1"/>
+          </a:effectRef>
+          <a:fontRef idx="minor">
+            <a:schemeClr val="lt1"/>
+          </a:fontRef>
+        </p:style>
+        <p:txBody>
+          <a:bodyPr rtlCol="0" anchor="ctr"/>
+          <a:lstStyle/>
+          <a:p>
+            <a:pPr algn="ctr"/>
+            <a:endParaRPr lang="en-DK"/>
+          </a:p>
+        </p:txBody>
+      </p:sp>
+      <p:pic>
+        <p:nvPicPr>
+          <p:cNvPr id="12" name="Graphic 11" descr="Laptop with solid fill">
+            <a:extLst>
+              <a:ext uri="{FF2B5EF4-FFF2-40B4-BE49-F238E27FC236}">
+                <a16:creationId xmlns:a16="http://schemas.microsoft.com/office/drawing/2014/main" id="{6CFC058C-56E5-777B-8CC5-2846E84F9D94}"/>
+              </a:ext>
+            </a:extLst>
+          </p:cNvPr>
+          <p:cNvPicPr>
+            <a:picLocks noChangeAspect="1"/>
+          </p:cNvPicPr>
+          <p:nvPr/>
+        </p:nvPicPr>
+        <p:blipFill>
+          <a:blip r:embed="rId6">
+            <a:extLst>
+              <a:ext uri="{96DAC541-7B7A-43D3-8B79-37D633B846F1}">
+                <asvg:svgBlip xmlns:asvg="http://schemas.microsoft.com/office/drawing/2016/SVG/main" r:embed="rId7"/>
+              </a:ext>
+            </a:extLst>
+          </a:blip>
+          <a:stretch>
+            <a:fillRect/>
+          </a:stretch>
+        </p:blipFill>
+        <p:spPr>
+          <a:xfrm>
+            <a:off x="18095123" y="3394603"/>
+            <a:ext cx="1678952" cy="1678952"/>
+          </a:xfrm>
+          <a:prstGeom prst="rect">
+            <a:avLst/>
+          </a:prstGeom>
+        </p:spPr>
+      </p:pic>
     </p:spTree>
     <p:extLst>
       <p:ext uri="{BB962C8B-B14F-4D97-AF65-F5344CB8AC3E}">
@@ -27178,12 +27257,14 @@
 </file>
 
 <file path=customXml/item1.xml><?xml version="1.0" encoding="utf-8"?>
-<?mso-contentType ?>
-<FormTemplates xmlns="http://schemas.microsoft.com/sharepoint/v3/contenttype/forms">
-  <Display>DocumentLibraryForm</Display>
-  <Edit>DocumentLibraryForm</Edit>
-  <New>DocumentLibraryForm</New>
-</FormTemplates>
+<p:properties xmlns:p="http://schemas.microsoft.com/office/2006/metadata/properties" xmlns:xsi="http://www.w3.org/2001/XMLSchema-instance" xmlns:pc="http://schemas.microsoft.com/office/infopath/2007/PartnerControls">
+  <documentManagement>
+    <lcf76f155ced4ddcb4097134ff3c332f xmlns="98eacbea-7562-4a40-a7f2-e999cdc0cec5">
+      <Terms xmlns="http://schemas.microsoft.com/office/infopath/2007/PartnerControls"/>
+    </lcf76f155ced4ddcb4097134ff3c332f>
+    <TaxCatchAll xmlns="75bf9804-c18d-470a-a27f-eeaf4abcd247" xsi:nil="true"/>
+  </documentManagement>
+</p:properties>
 </file>
 
 <file path=customXml/item2.xml><?xml version="1.0" encoding="utf-8"?>
@@ -27394,20 +27475,27 @@
 </file>
 
 <file path=customXml/item3.xml><?xml version="1.0" encoding="utf-8"?>
-<p:properties xmlns:p="http://schemas.microsoft.com/office/2006/metadata/properties" xmlns:xsi="http://www.w3.org/2001/XMLSchema-instance" xmlns:pc="http://schemas.microsoft.com/office/infopath/2007/PartnerControls">
-  <documentManagement>
-    <lcf76f155ced4ddcb4097134ff3c332f xmlns="98eacbea-7562-4a40-a7f2-e999cdc0cec5">
-      <Terms xmlns="http://schemas.microsoft.com/office/infopath/2007/PartnerControls"/>
-    </lcf76f155ced4ddcb4097134ff3c332f>
-    <TaxCatchAll xmlns="75bf9804-c18d-470a-a27f-eeaf4abcd247" xsi:nil="true"/>
-  </documentManagement>
-</p:properties>
+<?mso-contentType ?>
+<FormTemplates xmlns="http://schemas.microsoft.com/sharepoint/v3/contenttype/forms">
+  <Display>DocumentLibraryForm</Display>
+  <Edit>DocumentLibraryForm</Edit>
+  <New>DocumentLibraryForm</New>
+</FormTemplates>
 </file>
 
 <file path=customXml/itemProps1.xml><?xml version="1.0" encoding="utf-8"?>
-<ds:datastoreItem xmlns:ds="http://schemas.openxmlformats.org/officeDocument/2006/customXml" ds:itemID="{7D880353-A811-4A5E-ACC7-78B678F8698F}">
+<ds:datastoreItem xmlns:ds="http://schemas.openxmlformats.org/officeDocument/2006/customXml" ds:itemID="{0608C028-DB74-4132-93E9-98A6B8817B9A}">
   <ds:schemaRefs>
-    <ds:schemaRef ds:uri="http://schemas.microsoft.com/sharepoint/v3/contenttype/forms"/>
+    <ds:schemaRef ds:uri="http://purl.org/dc/terms/"/>
+    <ds:schemaRef ds:uri="http://schemas.openxmlformats.org/package/2006/metadata/core-properties"/>
+    <ds:schemaRef ds:uri="http://schemas.microsoft.com/office/2006/documentManagement/types"/>
+    <ds:schemaRef ds:uri="http://purl.org/dc/elements/1.1/"/>
+    <ds:schemaRef ds:uri="http://www.w3.org/XML/1998/namespace"/>
+    <ds:schemaRef ds:uri="http://purl.org/dc/dcmitype/"/>
+    <ds:schemaRef ds:uri="http://schemas.microsoft.com/office/infopath/2007/PartnerControls"/>
+    <ds:schemaRef ds:uri="75bf9804-c18d-470a-a27f-eeaf4abcd247"/>
+    <ds:schemaRef ds:uri="98eacbea-7562-4a40-a7f2-e999cdc0cec5"/>
+    <ds:schemaRef ds:uri="http://schemas.microsoft.com/office/2006/metadata/properties"/>
   </ds:schemaRefs>
 </ds:datastoreItem>
 </file>
@@ -27432,18 +27520,9 @@
 </file>
 
 <file path=customXml/itemProps3.xml><?xml version="1.0" encoding="utf-8"?>
-<ds:datastoreItem xmlns:ds="http://schemas.openxmlformats.org/officeDocument/2006/customXml" ds:itemID="{0608C028-DB74-4132-93E9-98A6B8817B9A}">
+<ds:datastoreItem xmlns:ds="http://schemas.openxmlformats.org/officeDocument/2006/customXml" ds:itemID="{7D880353-A811-4A5E-ACC7-78B678F8698F}">
   <ds:schemaRefs>
-    <ds:schemaRef ds:uri="http://purl.org/dc/terms/"/>
-    <ds:schemaRef ds:uri="http://schemas.openxmlformats.org/package/2006/metadata/core-properties"/>
-    <ds:schemaRef ds:uri="http://schemas.microsoft.com/office/2006/documentManagement/types"/>
-    <ds:schemaRef ds:uri="http://purl.org/dc/elements/1.1/"/>
-    <ds:schemaRef ds:uri="http://www.w3.org/XML/1998/namespace"/>
-    <ds:schemaRef ds:uri="http://purl.org/dc/dcmitype/"/>
-    <ds:schemaRef ds:uri="http://schemas.microsoft.com/office/infopath/2007/PartnerControls"/>
-    <ds:schemaRef ds:uri="75bf9804-c18d-470a-a27f-eeaf4abcd247"/>
-    <ds:schemaRef ds:uri="98eacbea-7562-4a40-a7f2-e999cdc0cec5"/>
-    <ds:schemaRef ds:uri="http://schemas.microsoft.com/office/2006/metadata/properties"/>
+    <ds:schemaRef ds:uri="http://schemas.microsoft.com/sharepoint/v3/contenttype/forms"/>
   </ds:schemaRefs>
 </ds:datastoreItem>
 </file>
--- a/use_cases_2.pptx
+++ b/use_cases_2.pptx
@@ -198,7 +198,7 @@
           <a:p>
             <a:fld id="{643F7372-8583-3647-8A6D-8602282481EA}" type="datetimeFigureOut">
               <a:rPr lang="en-US" smtClean="0"/>
-              <a:t>11/14/25</a:t>
+              <a:t>11/16/25</a:t>
             </a:fld>
             <a:endParaRPr lang="en-US"/>
           </a:p>
@@ -685,7 +685,7 @@
           <a:p>
             <a:fld id="{EA997AF5-C9B8-654C-B523-B4077F0C4FC6}" type="datetimeFigureOut">
               <a:rPr lang="en-GB" smtClean="0"/>
-              <a:t>14/11/2025</a:t>
+              <a:t>16/11/2025</a:t>
             </a:fld>
             <a:endParaRPr lang="en-GB"/>
           </a:p>
@@ -855,7 +855,7 @@
           <a:p>
             <a:fld id="{EA997AF5-C9B8-654C-B523-B4077F0C4FC6}" type="datetimeFigureOut">
               <a:rPr lang="en-GB" smtClean="0"/>
-              <a:t>14/11/2025</a:t>
+              <a:t>16/11/2025</a:t>
             </a:fld>
             <a:endParaRPr lang="en-GB"/>
           </a:p>
@@ -1035,7 +1035,7 @@
           <a:p>
             <a:fld id="{EA997AF5-C9B8-654C-B523-B4077F0C4FC6}" type="datetimeFigureOut">
               <a:rPr lang="en-GB" smtClean="0"/>
-              <a:t>14/11/2025</a:t>
+              <a:t>16/11/2025</a:t>
             </a:fld>
             <a:endParaRPr lang="en-GB"/>
           </a:p>
@@ -1205,7 +1205,7 @@
           <a:p>
             <a:fld id="{EA997AF5-C9B8-654C-B523-B4077F0C4FC6}" type="datetimeFigureOut">
               <a:rPr lang="en-GB" smtClean="0"/>
-              <a:t>14/11/2025</a:t>
+              <a:t>16/11/2025</a:t>
             </a:fld>
             <a:endParaRPr lang="en-GB"/>
           </a:p>
@@ -1451,7 +1451,7 @@
           <a:p>
             <a:fld id="{EA997AF5-C9B8-654C-B523-B4077F0C4FC6}" type="datetimeFigureOut">
               <a:rPr lang="en-GB" smtClean="0"/>
-              <a:t>14/11/2025</a:t>
+              <a:t>16/11/2025</a:t>
             </a:fld>
             <a:endParaRPr lang="en-GB"/>
           </a:p>
@@ -1683,7 +1683,7 @@
           <a:p>
             <a:fld id="{EA997AF5-C9B8-654C-B523-B4077F0C4FC6}" type="datetimeFigureOut">
               <a:rPr lang="en-GB" smtClean="0"/>
-              <a:t>14/11/2025</a:t>
+              <a:t>16/11/2025</a:t>
             </a:fld>
             <a:endParaRPr lang="en-GB"/>
           </a:p>
@@ -2050,7 +2050,7 @@
           <a:p>
             <a:fld id="{EA997AF5-C9B8-654C-B523-B4077F0C4FC6}" type="datetimeFigureOut">
               <a:rPr lang="en-GB" smtClean="0"/>
-              <a:t>14/11/2025</a:t>
+              <a:t>16/11/2025</a:t>
             </a:fld>
             <a:endParaRPr lang="en-GB"/>
           </a:p>
@@ -2168,7 +2168,7 @@
           <a:p>
             <a:fld id="{EA997AF5-C9B8-654C-B523-B4077F0C4FC6}" type="datetimeFigureOut">
               <a:rPr lang="en-GB" smtClean="0"/>
-              <a:t>14/11/2025</a:t>
+              <a:t>16/11/2025</a:t>
             </a:fld>
             <a:endParaRPr lang="en-GB"/>
           </a:p>
@@ -2263,7 +2263,7 @@
           <a:p>
             <a:fld id="{EA997AF5-C9B8-654C-B523-B4077F0C4FC6}" type="datetimeFigureOut">
               <a:rPr lang="en-GB" smtClean="0"/>
-              <a:t>14/11/2025</a:t>
+              <a:t>16/11/2025</a:t>
             </a:fld>
             <a:endParaRPr lang="en-GB"/>
           </a:p>
@@ -2540,7 +2540,7 @@
           <a:p>
             <a:fld id="{EA997AF5-C9B8-654C-B523-B4077F0C4FC6}" type="datetimeFigureOut">
               <a:rPr lang="en-GB" smtClean="0"/>
-              <a:t>14/11/2025</a:t>
+              <a:t>16/11/2025</a:t>
             </a:fld>
             <a:endParaRPr lang="en-GB"/>
           </a:p>
@@ -2797,7 +2797,7 @@
           <a:p>
             <a:fld id="{EA997AF5-C9B8-654C-B523-B4077F0C4FC6}" type="datetimeFigureOut">
               <a:rPr lang="en-GB" smtClean="0"/>
-              <a:t>14/11/2025</a:t>
+              <a:t>16/11/2025</a:t>
             </a:fld>
             <a:endParaRPr lang="en-GB"/>
           </a:p>
@@ -3010,7 +3010,7 @@
           <a:p>
             <a:fld id="{EA997AF5-C9B8-654C-B523-B4077F0C4FC6}" type="datetimeFigureOut">
               <a:rPr lang="en-GB" smtClean="0"/>
-              <a:t>14/11/2025</a:t>
+              <a:t>16/11/2025</a:t>
             </a:fld>
             <a:endParaRPr lang="en-GB"/>
           </a:p>
@@ -22941,7 +22941,7 @@
         </p:nvSpPr>
         <p:spPr>
           <a:xfrm>
-            <a:off x="5483223" y="16052266"/>
+            <a:off x="5908225" y="7385389"/>
             <a:ext cx="5648915" cy="932259"/>
           </a:xfrm>
           <a:prstGeom prst="roundRect">
@@ -23310,7 +23310,7 @@
         </p:nvSpPr>
         <p:spPr>
           <a:xfrm>
-            <a:off x="22967894" y="15142378"/>
+            <a:off x="11856500" y="7273286"/>
             <a:ext cx="4552781" cy="2050971"/>
           </a:xfrm>
           <a:prstGeom prst="roundRect">
@@ -23391,7 +23391,7 @@
         </p:nvSpPr>
         <p:spPr>
           <a:xfrm>
-            <a:off x="28413765" y="14671940"/>
+            <a:off x="18095123" y="14536410"/>
             <a:ext cx="5648915" cy="2330648"/>
           </a:xfrm>
           <a:prstGeom prst="roundRect">
@@ -24029,7 +24029,7 @@
         </p:nvSpPr>
         <p:spPr>
           <a:xfrm>
-            <a:off x="11957376" y="14671940"/>
+            <a:off x="17631601" y="7884857"/>
             <a:ext cx="5648915" cy="1771293"/>
           </a:xfrm>
           <a:prstGeom prst="roundRect">
@@ -24191,7 +24191,7 @@
         </p:nvSpPr>
         <p:spPr>
           <a:xfrm>
-            <a:off x="510377" y="18030284"/>
+            <a:off x="103211" y="8427935"/>
             <a:ext cx="5648915" cy="1211937"/>
           </a:xfrm>
           <a:prstGeom prst="roundRect">
@@ -24282,7 +24282,7 @@
         </p:nvSpPr>
         <p:spPr>
           <a:xfrm>
-            <a:off x="596394" y="15017072"/>
+            <a:off x="6005360" y="15488154"/>
             <a:ext cx="3993739" cy="2610326"/>
           </a:xfrm>
           <a:prstGeom prst="roundRect">
@@ -24645,7 +24645,7 @@
         </p:nvSpPr>
         <p:spPr>
           <a:xfrm>
-            <a:off x="29989584" y="17485727"/>
+            <a:off x="11772512" y="16658453"/>
             <a:ext cx="5648915" cy="1491615"/>
           </a:xfrm>
           <a:prstGeom prst="roundRect">
@@ -26152,104 +26152,6 @@
           </a:p>
         </p:txBody>
       </p:sp>
-      <p:cxnSp>
-        <p:nvCxnSpPr>
-          <p:cNvPr id="475" name="Elbow Connector 474">
-            <a:extLst>
-              <a:ext uri="{FF2B5EF4-FFF2-40B4-BE49-F238E27FC236}">
-                <a16:creationId xmlns:a16="http://schemas.microsoft.com/office/drawing/2014/main" id="{043A7CD1-AEC7-33B5-E0CA-3A17FE23D4E0}"/>
-              </a:ext>
-            </a:extLst>
-          </p:cNvPr>
-          <p:cNvCxnSpPr>
-            <a:cxnSpLocks/>
-            <a:stCxn id="430" idx="0"/>
-            <a:endCxn id="251" idx="1"/>
-          </p:cNvCxnSpPr>
-          <p:nvPr/>
-        </p:nvCxnSpPr>
-        <p:spPr>
-          <a:xfrm rot="5400000" flipH="1" flipV="1">
-            <a:off x="6034659" y="7622843"/>
-            <a:ext cx="4769012" cy="595491"/>
-          </a:xfrm>
-          <a:prstGeom prst="bentConnector2">
-            <a:avLst/>
-          </a:prstGeom>
-          <a:ln w="38100">
-            <a:solidFill>
-              <a:schemeClr val="bg1">
-                <a:lumMod val="75000"/>
-              </a:schemeClr>
-            </a:solidFill>
-            <a:prstDash val="sysDash"/>
-            <a:tailEnd type="triangle"/>
-          </a:ln>
-        </p:spPr>
-        <p:style>
-          <a:lnRef idx="2">
-            <a:schemeClr val="accent1"/>
-          </a:lnRef>
-          <a:fillRef idx="0">
-            <a:schemeClr val="accent1"/>
-          </a:fillRef>
-          <a:effectRef idx="1">
-            <a:schemeClr val="accent1"/>
-          </a:effectRef>
-          <a:fontRef idx="minor">
-            <a:schemeClr val="tx1"/>
-          </a:fontRef>
-        </p:style>
-      </p:cxnSp>
-      <p:cxnSp>
-        <p:nvCxnSpPr>
-          <p:cNvPr id="479" name="Elbow Connector 478">
-            <a:extLst>
-              <a:ext uri="{FF2B5EF4-FFF2-40B4-BE49-F238E27FC236}">
-                <a16:creationId xmlns:a16="http://schemas.microsoft.com/office/drawing/2014/main" id="{8D481165-71E1-6653-E097-31C2DD2DD210}"/>
-              </a:ext>
-            </a:extLst>
-          </p:cNvPr>
-          <p:cNvCxnSpPr>
-            <a:cxnSpLocks/>
-            <a:stCxn id="430" idx="0"/>
-            <a:endCxn id="200" idx="1"/>
-          </p:cNvCxnSpPr>
-          <p:nvPr/>
-        </p:nvCxnSpPr>
-        <p:spPr>
-          <a:xfrm rot="5400000" flipH="1" flipV="1">
-            <a:off x="6691424" y="8279608"/>
-            <a:ext cx="3455482" cy="595491"/>
-          </a:xfrm>
-          <a:prstGeom prst="bentConnector2">
-            <a:avLst/>
-          </a:prstGeom>
-          <a:ln w="38100">
-            <a:solidFill>
-              <a:schemeClr val="bg1">
-                <a:lumMod val="75000"/>
-              </a:schemeClr>
-            </a:solidFill>
-            <a:prstDash val="sysDash"/>
-            <a:tailEnd type="triangle"/>
-          </a:ln>
-        </p:spPr>
-        <p:style>
-          <a:lnRef idx="2">
-            <a:schemeClr val="accent1"/>
-          </a:lnRef>
-          <a:fillRef idx="0">
-            <a:schemeClr val="accent1"/>
-          </a:fillRef>
-          <a:effectRef idx="1">
-            <a:schemeClr val="accent1"/>
-          </a:effectRef>
-          <a:fontRef idx="minor">
-            <a:schemeClr val="tx1"/>
-          </a:fontRef>
-        </p:style>
-      </p:cxnSp>
       <p:sp>
         <p:nvSpPr>
           <p:cNvPr id="2" name="Oval 1">
@@ -27268,6 +27170,15 @@
 </file>
 
 <file path=customXml/item2.xml><?xml version="1.0" encoding="utf-8"?>
+<?mso-contentType ?>
+<FormTemplates xmlns="http://schemas.microsoft.com/sharepoint/v3/contenttype/forms">
+  <Display>DocumentLibraryForm</Display>
+  <Edit>DocumentLibraryForm</Edit>
+  <New>DocumentLibraryForm</New>
+</FormTemplates>
+</file>
+
+<file path=customXml/item3.xml><?xml version="1.0" encoding="utf-8"?>
 <ct:contentTypeSchema xmlns:ct="http://schemas.microsoft.com/office/2006/metadata/contentType" xmlns:ma="http://schemas.microsoft.com/office/2006/metadata/properties/metaAttributes" ct:_="" ma:_="" ma:contentTypeName="Document" ma:contentTypeID="0x010100D47D794EB48E7144959FE534A5ED3D9A" ma:contentTypeVersion="13" ma:contentTypeDescription="Create a new document." ma:contentTypeScope="" ma:versionID="332ebed6bf1f21540ac8ed4139e2af2e">
   <xsd:schema xmlns:xsd="http://www.w3.org/2001/XMLSchema" xmlns:xs="http://www.w3.org/2001/XMLSchema" xmlns:p="http://schemas.microsoft.com/office/2006/metadata/properties" xmlns:ns2="98eacbea-7562-4a40-a7f2-e999cdc0cec5" xmlns:ns3="75bf9804-c18d-470a-a27f-eeaf4abcd247" targetNamespace="http://schemas.microsoft.com/office/2006/metadata/properties" ma:root="true" ma:fieldsID="9643d50ff51ef4e8f7efba950a0a6c6b" ns2:_="" ns3:_="">
     <xsd:import namespace="98eacbea-7562-4a40-a7f2-e999cdc0cec5"/>
@@ -27474,15 +27385,6 @@
 </ct:contentTypeSchema>
 </file>
 
-<file path=customXml/item3.xml><?xml version="1.0" encoding="utf-8"?>
-<?mso-contentType ?>
-<FormTemplates xmlns="http://schemas.microsoft.com/sharepoint/v3/contenttype/forms">
-  <Display>DocumentLibraryForm</Display>
-  <Edit>DocumentLibraryForm</Edit>
-  <New>DocumentLibraryForm</New>
-</FormTemplates>
-</file>
-
 <file path=customXml/itemProps1.xml><?xml version="1.0" encoding="utf-8"?>
 <ds:datastoreItem xmlns:ds="http://schemas.openxmlformats.org/officeDocument/2006/customXml" ds:itemID="{0608C028-DB74-4132-93E9-98A6B8817B9A}">
   <ds:schemaRefs>
@@ -27501,6 +27403,14 @@
 </file>
 
 <file path=customXml/itemProps2.xml><?xml version="1.0" encoding="utf-8"?>
+<ds:datastoreItem xmlns:ds="http://schemas.openxmlformats.org/officeDocument/2006/customXml" ds:itemID="{7D880353-A811-4A5E-ACC7-78B678F8698F}">
+  <ds:schemaRefs>
+    <ds:schemaRef ds:uri="http://schemas.microsoft.com/sharepoint/v3/contenttype/forms"/>
+  </ds:schemaRefs>
+</ds:datastoreItem>
+</file>
+
+<file path=customXml/itemProps3.xml><?xml version="1.0" encoding="utf-8"?>
 <ds:datastoreItem xmlns:ds="http://schemas.openxmlformats.org/officeDocument/2006/customXml" ds:itemID="{9A4B6344-9988-4B81-A67B-403A5F797536}">
   <ds:schemaRefs>
     <ds:schemaRef ds:uri="http://schemas.microsoft.com/office/2006/metadata/contentType"/>
@@ -27517,12 +27427,4 @@
     <ds:schemaRef ds:uri="http://schemas.microsoft.com/internal/obd"/>
   </ds:schemaRefs>
 </ds:datastoreItem>
-</file>
-
-<file path=customXml/itemProps3.xml><?xml version="1.0" encoding="utf-8"?>
-<ds:datastoreItem xmlns:ds="http://schemas.openxmlformats.org/officeDocument/2006/customXml" ds:itemID="{7D880353-A811-4A5E-ACC7-78B678F8698F}">
-  <ds:schemaRefs>
-    <ds:schemaRef ds:uri="http://schemas.microsoft.com/sharepoint/v3/contenttype/forms"/>
-  </ds:schemaRefs>
-</ds:datastoreItem>
 </file>